--- a/ST-1/decks/st1-owner-agency.pptx
+++ b/ST-1/decks/st1-owner-agency.pptx
@@ -511,7 +511,7 @@
           <a:lstStyle/>
           <a:p>
             <a:r>
-              <a:t>Ivory background, navy type, muted gold accent; ample space; direct copy; no personnel humor.</a:t>
+              <a:t>Ivory background, dark navy type, teal owner accent; ample space; direct copy; no personnel humor.</a:t>
             </a:r>
           </a:p>
           <a:p/>
@@ -775,6 +775,21 @@
               <a:t>Limit: Article XVI funding and Article XXIII CBT are separate; actual funding records unavailable.</a:t>
             </a:r>
           </a:p>
+          <a:p>
+            <a:r>
+              <a:t>[SOTO1] MLB: Soto agreement 2024-12-11</a:t>
+            </a:r>
+          </a:p>
+          <a:p>
+            <a:r>
+              <a:t>https://www.mlb.com/news/juan-soto-agrees-to-contract-with-mets</a:t>
+            </a:r>
+          </a:p>
+          <a:p>
+            <a:r>
+              <a:t>Limit: League reporting, not signed-contract review.</a:t>
+            </a:r>
+          </a:p>
         </p:txBody>
       </p:sp>
       <p:sp>
@@ -1725,7 +1740,7 @@
           <a:lstStyle/>
           <a:p>
             <a:r>
-              <a:t>Merged investment question and leadership decision. Add attributable retained club contribution and avoided alternative roster costs. Subtract compensation, marginal CBT tax and other incremental club costs. Count monetized sporting benefits once. Keep athlete endorsements outside the club ledger. Specify the alternative roster and its expected costs and contribution. Obtain attributable club receipts, retained margins and funding records. Rebuild remaining obligations for a current valuation. Current evidence supports opportunity, not proven net breakeven or a 'best ever' ranking.</a:t>
+              <a:t>Merged investment question and leadership decision. Add attributable retained club contribution and avoided alternative roster costs. Subtract compensation, marginal CBT tax and other incremental club costs. Count monetized sporting benefits once. Keep athlete endorsements outside the club ledger. Specify the alternative roster and its expected costs and contribution. Obtain attributable club receipts, retained margins and funding records. Rebuild remaining obligations for a current valuation. Current evidence supports opportunity, not proven net breakeven or a 'best ever' ranking. This table is a contract-structure comparator, not a computed present-value comparison or a rank of investment returns. Use consistent expected-performance assumptions and dates. Keep athlete endorsements outside club receipts. Source limits apply.</a:t>
             </a:r>
           </a:p>
           <a:p/>
@@ -1736,28 +1751,53 @@
           </a:p>
           <a:p>
             <a:r>
-              <a:t>Compare attributable retained club contribution and avoided roster costs with compensation, marginal CBT tax and other incremental costs.</a:t>
-            </a:r>
-          </a:p>
-          <a:p>
-            <a:r>
-              <a:t>Obtain the alternative roster, attributable receipts, margins and funding records.</a:t>
-            </a:r>
-          </a:p>
-          <a:p>
-            <a:r>
-              <a:t>Count sporting benefits once; keep player endorsements outside club receipts.</a:t>
-            </a:r>
-          </a:p>
-          <a:p>
-            <a:r>
-              <a:t>Update remaining obligations for today. Current evidence does not prove net breakeven or a best-ever ranking.</a:t>
+              <a:t>Normalize valuation date, cash timing, duration, option scenarios and expected contribution before comparing.</a:t>
+            </a:r>
+          </a:p>
+          <a:p>
+            <a:r>
+              <a:t>Value retained club contribution and roster alternatives against compensation, marginal CBT tax and other incremental costs.</a:t>
+            </a:r>
+          </a:p>
+          <a:p>
+            <a:r>
+              <a:t>Headline totals do not establish net breakeven or a best-ever ranking.</a:t>
             </a:r>
           </a:p>
           <a:p/>
           <a:p>
             <a:r>
               <a:t>Sources:</a:t>
+            </a:r>
+          </a:p>
+          <a:p>
+            <a:r>
+              <a:t>[MLB1] MLB: Ohtani contract deferrals explained 2023-12-12</a:t>
+            </a:r>
+          </a:p>
+          <a:p>
+            <a:r>
+              <a:t>https://www.mlb.com/news/shohei-ohtani-dodgers-deal-deferrals-explained</a:t>
+            </a:r>
+          </a:p>
+          <a:p>
+            <a:r>
+              <a:t>Limit: League reporting cites an unnamed source for full terms; CBT amount approximate.</a:t>
+            </a:r>
+          </a:p>
+          <a:p>
+            <a:r>
+              <a:t>[SOTO1] MLB: Soto agreement 2024-12-11</a:t>
+            </a:r>
+          </a:p>
+          <a:p>
+            <a:r>
+              <a:t>https://www.mlb.com/news/juan-soto-agrees-to-contract-with-mets</a:t>
+            </a:r>
+          </a:p>
+          <a:p>
+            <a:r>
+              <a:t>Limit: League reporting, not signed-contract review.</a:t>
             </a:r>
           </a:p>
           <a:p>
@@ -5601,7 +5641,7 @@
         </p:nvSpPr>
         <p:spPr>
           <a:xfrm>
-            <a:off x="609600" y="2603500"/>
+            <a:off x="609600" y="2476500"/>
             <a:ext cx="5130800" cy="342900"/>
           </a:xfrm>
           <a:prstGeom prst="rect">
@@ -5649,7 +5689,7 @@
         </p:nvSpPr>
         <p:spPr>
           <a:xfrm>
-            <a:off x="609600" y="2959100"/>
+            <a:off x="609600" y="2832100"/>
             <a:ext cx="5130800" cy="317500"/>
           </a:xfrm>
           <a:prstGeom prst="rect">
@@ -5697,7 +5737,7 @@
         </p:nvSpPr>
         <p:spPr>
           <a:xfrm>
-            <a:off x="609600" y="3365500"/>
+            <a:off x="609600" y="3111500"/>
             <a:ext cx="5130800" cy="342900"/>
           </a:xfrm>
           <a:prstGeom prst="rect">
@@ -5745,7 +5785,7 @@
         </p:nvSpPr>
         <p:spPr>
           <a:xfrm>
-            <a:off x="609600" y="3721100"/>
+            <a:off x="609600" y="3467100"/>
             <a:ext cx="5130800" cy="317500"/>
           </a:xfrm>
           <a:prstGeom prst="rect">
@@ -5793,7 +5833,7 @@
         </p:nvSpPr>
         <p:spPr>
           <a:xfrm>
-            <a:off x="609600" y="4127500"/>
+            <a:off x="609600" y="3746500"/>
             <a:ext cx="5130800" cy="342900"/>
           </a:xfrm>
           <a:prstGeom prst="rect">
@@ -5841,7 +5881,7 @@
         </p:nvSpPr>
         <p:spPr>
           <a:xfrm>
-            <a:off x="609600" y="4483100"/>
+            <a:off x="609600" y="4102100"/>
             <a:ext cx="5130800" cy="317500"/>
           </a:xfrm>
           <a:prstGeom prst="rect">
@@ -5889,7 +5929,7 @@
         </p:nvSpPr>
         <p:spPr>
           <a:xfrm>
-            <a:off x="609600" y="4889500"/>
+            <a:off x="609600" y="4381500"/>
             <a:ext cx="5130800" cy="342900"/>
           </a:xfrm>
           <a:prstGeom prst="rect">
@@ -5937,7 +5977,7 @@
         </p:nvSpPr>
         <p:spPr>
           <a:xfrm>
-            <a:off x="609600" y="5245100"/>
+            <a:off x="609600" y="4737100"/>
             <a:ext cx="5130800" cy="317500"/>
           </a:xfrm>
           <a:prstGeom prst="rect">
@@ -5985,7 +6025,7 @@
         </p:nvSpPr>
         <p:spPr>
           <a:xfrm>
-            <a:off x="6248400" y="1841500"/>
+            <a:off x="609600" y="5016500"/>
             <a:ext cx="5130800" cy="342900"/>
           </a:xfrm>
           <a:prstGeom prst="rect">
@@ -6033,7 +6073,7 @@
         </p:nvSpPr>
         <p:spPr>
           <a:xfrm>
-            <a:off x="6248400" y="2197100"/>
+            <a:off x="609600" y="5372100"/>
             <a:ext cx="5130800" cy="317500"/>
           </a:xfrm>
           <a:prstGeom prst="rect">
@@ -6081,7 +6121,7 @@
         </p:nvSpPr>
         <p:spPr>
           <a:xfrm>
-            <a:off x="6248400" y="2603500"/>
+            <a:off x="6248400" y="1841500"/>
             <a:ext cx="5130800" cy="342900"/>
           </a:xfrm>
           <a:prstGeom prst="rect">
@@ -6129,7 +6169,7 @@
         </p:nvSpPr>
         <p:spPr>
           <a:xfrm>
-            <a:off x="6248400" y="2959100"/>
+            <a:off x="6248400" y="2197100"/>
             <a:ext cx="5130800" cy="317500"/>
           </a:xfrm>
           <a:prstGeom prst="rect">
@@ -6177,7 +6217,7 @@
         </p:nvSpPr>
         <p:spPr>
           <a:xfrm>
-            <a:off x="6248400" y="3365500"/>
+            <a:off x="6248400" y="2476500"/>
             <a:ext cx="5130800" cy="342900"/>
           </a:xfrm>
           <a:prstGeom prst="rect">
@@ -6225,7 +6265,7 @@
         </p:nvSpPr>
         <p:spPr>
           <a:xfrm>
-            <a:off x="6248400" y="3721100"/>
+            <a:off x="6248400" y="2832100"/>
             <a:ext cx="5130800" cy="317500"/>
           </a:xfrm>
           <a:prstGeom prst="rect">
@@ -6273,7 +6313,7 @@
         </p:nvSpPr>
         <p:spPr>
           <a:xfrm>
-            <a:off x="6248400" y="4127500"/>
+            <a:off x="6248400" y="3111500"/>
             <a:ext cx="5130800" cy="342900"/>
           </a:xfrm>
           <a:prstGeom prst="rect">
@@ -6321,7 +6361,7 @@
         </p:nvSpPr>
         <p:spPr>
           <a:xfrm>
-            <a:off x="6248400" y="4483100"/>
+            <a:off x="6248400" y="3467100"/>
             <a:ext cx="5130800" cy="317500"/>
           </a:xfrm>
           <a:prstGeom prst="rect">
@@ -6369,7 +6409,7 @@
         </p:nvSpPr>
         <p:spPr>
           <a:xfrm>
-            <a:off x="6248400" y="4889500"/>
+            <a:off x="6248400" y="3746500"/>
             <a:ext cx="5130800" cy="342900"/>
           </a:xfrm>
           <a:prstGeom prst="rect">
@@ -6417,7 +6457,7 @@
         </p:nvSpPr>
         <p:spPr>
           <a:xfrm>
-            <a:off x="6248400" y="5245100"/>
+            <a:off x="6248400" y="4102100"/>
             <a:ext cx="5130800" cy="317500"/>
           </a:xfrm>
           <a:prstGeom prst="rect">
@@ -6457,9 +6497,105 @@
           </a:p>
         </p:txBody>
       </p:sp>
+      <p:sp>
+        <p:nvSpPr>
+          <p:cNvPr id="26" name="TextBox 25"/>
+          <p:cNvSpPr txBox="1"/>
+          <p:nvPr/>
+        </p:nvSpPr>
+        <p:spPr>
+          <a:xfrm>
+            <a:off x="6248400" y="4381500"/>
+            <a:ext cx="5130800" cy="342900"/>
+          </a:xfrm>
+          <a:prstGeom prst="rect">
+            <a:avLst/>
+          </a:prstGeom>
+          <a:noFill/>
+        </p:spPr>
+        <p:txBody>
+          <a:bodyPr wrap="none" lIns="0" rIns="0" tIns="0" bIns="0">
+            <a:spAutoFit/>
+          </a:bodyPr>
+          <a:lstStyle/>
+          <a:p>
+            <a:pPr>
+              <a:lnSpc>
+                <a:spcPts val="1476"/>
+              </a:lnSpc>
+              <a:spcBef>
+                <a:spcPts val="0"/>
+              </a:spcBef>
+              <a:spcAft>
+                <a:spcPts val="0"/>
+              </a:spcAft>
+              <a:defRPr sz="1200" b="1">
+                <a:solidFill>
+                  <a:srgbClr val="142A40"/>
+                </a:solidFill>
+                <a:latin typeface="Arial"/>
+              </a:defRPr>
+            </a:pPr>
+            <a:r>
+              <a:rPr>
+                <a:hlinkClick r:id="rId12"/>
+              </a:rPr>
+              <a:t>[SOTO1] MLB: Soto agreement</a:t>
+            </a:r>
+          </a:p>
+        </p:txBody>
+      </p:sp>
+      <p:sp>
+        <p:nvSpPr>
+          <p:cNvPr id="27" name="TextBox 26"/>
+          <p:cNvSpPr txBox="1"/>
+          <p:nvPr/>
+        </p:nvSpPr>
+        <p:spPr>
+          <a:xfrm>
+            <a:off x="6248400" y="4737100"/>
+            <a:ext cx="5130800" cy="317500"/>
+          </a:xfrm>
+          <a:prstGeom prst="rect">
+            <a:avLst/>
+          </a:prstGeom>
+          <a:noFill/>
+        </p:spPr>
+        <p:txBody>
+          <a:bodyPr wrap="none" lIns="0" rIns="0" tIns="0" bIns="0">
+            <a:spAutoFit/>
+          </a:bodyPr>
+          <a:lstStyle/>
+          <a:p>
+            <a:pPr>
+              <a:lnSpc>
+                <a:spcPts val="1107"/>
+              </a:lnSpc>
+              <a:spcBef>
+                <a:spcPts val="0"/>
+              </a:spcBef>
+              <a:spcAft>
+                <a:spcPts val="0"/>
+              </a:spcAft>
+              <a:defRPr sz="900" b="0">
+                <a:solidFill>
+                  <a:srgbClr val="142A40"/>
+                </a:solidFill>
+                <a:latin typeface="Arial"/>
+              </a:defRPr>
+            </a:pPr>
+            <a:r>
+              <a:rPr>
+                <a:hlinkClick r:id="rId12"/>
+              </a:rPr>
+              <a:t>www.mlb.com | 2024-12-11</a:t>
+            </a:r>
+          </a:p>
+        </p:txBody>
+      </p:sp>
       <p:cxnSp>
         <p:nvCxnSpPr>
-          <p:cNvPr id="26" name="Connector 25"/>
+          <p:cNvPr id="28" name="Connector 27"/>
           <p:cNvCxnSpPr/>
           <p:nvPr/>
         </p:nvCxnSpPr>
@@ -6494,7 +6630,7 @@
       </p:cxnSp>
       <p:sp>
         <p:nvSpPr>
-          <p:cNvPr id="27" name="TextBox 26"/>
+          <p:cNvPr id="29" name="TextBox 28"/>
           <p:cNvSpPr txBox="1"/>
           <p:nvPr/>
         </p:nvSpPr>
@@ -6539,7 +6675,7 @@
       </p:sp>
       <p:sp>
         <p:nvSpPr>
-          <p:cNvPr id="28" name="TextBox 27"/>
+          <p:cNvPr id="30" name="TextBox 29"/>
           <p:cNvSpPr txBox="1"/>
           <p:nvPr/>
         </p:nvSpPr>
@@ -15695,7 +15831,7 @@
               </a:defRPr>
             </a:pPr>
             <a:r>
-              <a:t>Leadership decision | value the alternative</a:t>
+              <a:t>Soto comparison | normalize before ranking</a:t>
             </a:r>
           </a:p>
         </p:txBody>
@@ -15740,7 +15876,7 @@
               </a:defRPr>
             </a:pPr>
             <a:r>
-              <a:t>Advance the opportunity case; establish incremental club cash flow.</a:t>
+              <a:t>Different commitments need a common valuation basis.</a:t>
             </a:r>
           </a:p>
         </p:txBody>
@@ -15753,14 +15889,14 @@
         </p:nvSpPr>
         <p:spPr>
           <a:xfrm>
-            <a:off x="609600" y="2692400"/>
-            <a:ext cx="63500" cy="63500"/>
+            <a:off x="609600" y="2603500"/>
+            <a:ext cx="10795000" cy="717528"/>
           </a:xfrm>
           <a:prstGeom prst="rect">
             <a:avLst/>
           </a:prstGeom>
           <a:solidFill>
-            <a:srgbClr val="007F83"/>
+            <a:srgbClr val="142A40"/>
           </a:solidFill>
           <a:ln>
             <a:noFill/>
@@ -15796,8 +15932,8 @@
         </p:nvSpPr>
         <p:spPr>
           <a:xfrm>
-            <a:off x="863600" y="2603500"/>
-            <a:ext cx="10541000" cy="574675"/>
+            <a:off x="762000" y="2730500"/>
+            <a:ext cx="3293533" cy="514328"/>
           </a:xfrm>
           <a:prstGeom prst="rect">
             <a:avLst/>
@@ -15812,65 +15948,133 @@
           <a:p>
             <a:pPr>
               <a:lnSpc>
-                <a:spcPts val="2214"/>
-              </a:lnSpc>
-              <a:spcBef>
-                <a:spcPts val="0"/>
-              </a:spcBef>
-              <a:spcAft>
-                <a:spcPts val="0"/>
-              </a:spcAft>
-              <a:defRPr sz="1800" b="0">
-                <a:solidFill>
-                  <a:srgbClr val="142A40"/>
-                </a:solidFill>
-                <a:latin typeface="Arial"/>
-              </a:defRPr>
-            </a:pPr>
-            <a:r>
-              <a:t>Compare attributable retained club contribution and avoided roster costs with compensation, marginal</a:t>
-            </a:r>
-          </a:p>
-          <a:p>
-            <a:pPr>
-              <a:lnSpc>
-                <a:spcPts val="2214"/>
-              </a:lnSpc>
-              <a:spcBef>
-                <a:spcPts val="0"/>
-              </a:spcBef>
-              <a:spcAft>
-                <a:spcPts val="0"/>
-              </a:spcAft>
-              <a:defRPr sz="1800" b="0">
-                <a:solidFill>
-                  <a:srgbClr val="142A40"/>
-                </a:solidFill>
-                <a:latin typeface="Arial"/>
-              </a:defRPr>
-            </a:pPr>
-            <a:r>
-              <a:t>CBT tax and other incremental costs.</a:t>
-            </a:r>
-          </a:p>
-        </p:txBody>
-      </p:sp>
-      <p:sp>
-        <p:nvSpPr>
-          <p:cNvPr id="9" name="Rectangle 8"/>
+                <a:spcPts val="1845"/>
+              </a:lnSpc>
+              <a:spcBef>
+                <a:spcPts val="0"/>
+              </a:spcBef>
+              <a:spcAft>
+                <a:spcPts val="0"/>
+              </a:spcAft>
+              <a:defRPr sz="1500" b="1">
+                <a:solidFill>
+                  <a:srgbClr val="FFFFFF"/>
+                </a:solidFill>
+                <a:latin typeface="Arial"/>
+              </a:defRPr>
+            </a:pPr>
+            <a:r>
+              <a:t>Player</a:t>
+            </a:r>
+          </a:p>
+        </p:txBody>
+      </p:sp>
+      <p:sp>
+        <p:nvSpPr>
+          <p:cNvPr id="9" name="TextBox 8"/>
+          <p:cNvSpPr txBox="1"/>
+          <p:nvPr/>
+        </p:nvSpPr>
+        <p:spPr>
+          <a:xfrm>
+            <a:off x="4360333" y="2730500"/>
+            <a:ext cx="3293533" cy="514328"/>
+          </a:xfrm>
+          <a:prstGeom prst="rect">
+            <a:avLst/>
+          </a:prstGeom>
+          <a:noFill/>
+        </p:spPr>
+        <p:txBody>
+          <a:bodyPr wrap="none" lIns="0" rIns="0" tIns="0" bIns="0">
+            <a:spAutoFit/>
+          </a:bodyPr>
+          <a:lstStyle/>
+          <a:p>
+            <a:pPr>
+              <a:lnSpc>
+                <a:spcPts val="1845"/>
+              </a:lnSpc>
+              <a:spcBef>
+                <a:spcPts val="0"/>
+              </a:spcBef>
+              <a:spcAft>
+                <a:spcPts val="0"/>
+              </a:spcAft>
+              <a:defRPr sz="1500" b="1">
+                <a:solidFill>
+                  <a:srgbClr val="FFFFFF"/>
+                </a:solidFill>
+                <a:latin typeface="Arial"/>
+              </a:defRPr>
+            </a:pPr>
+            <a:r>
+              <a:t>Term / nominal USD</a:t>
+            </a:r>
+          </a:p>
+        </p:txBody>
+      </p:sp>
+      <p:sp>
+        <p:nvSpPr>
+          <p:cNvPr id="10" name="TextBox 9"/>
+          <p:cNvSpPr txBox="1"/>
+          <p:nvPr/>
+        </p:nvSpPr>
+        <p:spPr>
+          <a:xfrm>
+            <a:off x="7958666" y="2730500"/>
+            <a:ext cx="3293533" cy="514328"/>
+          </a:xfrm>
+          <a:prstGeom prst="rect">
+            <a:avLst/>
+          </a:prstGeom>
+          <a:noFill/>
+        </p:spPr>
+        <p:txBody>
+          <a:bodyPr wrap="none" lIns="0" rIns="0" tIns="0" bIns="0">
+            <a:spAutoFit/>
+          </a:bodyPr>
+          <a:lstStyle/>
+          <a:p>
+            <a:pPr>
+              <a:lnSpc>
+                <a:spcPts val="1845"/>
+              </a:lnSpc>
+              <a:spcBef>
+                <a:spcPts val="0"/>
+              </a:spcBef>
+              <a:spcAft>
+                <a:spcPts val="0"/>
+              </a:spcAft>
+              <a:defRPr sz="1500" b="1">
+                <a:solidFill>
+                  <a:srgbClr val="FFFFFF"/>
+                </a:solidFill>
+                <a:latin typeface="Arial"/>
+              </a:defRPr>
+            </a:pPr>
+            <a:r>
+              <a:t>Payment structure</a:t>
+            </a:r>
+          </a:p>
+        </p:txBody>
+      </p:sp>
+      <p:sp>
+        <p:nvSpPr>
+          <p:cNvPr id="11" name="Rectangle 10"/>
           <p:cNvSpPr/>
           <p:nvPr/>
         </p:nvSpPr>
         <p:spPr>
           <a:xfrm>
-            <a:off x="609600" y="3495675"/>
-            <a:ext cx="63500" cy="63500"/>
+            <a:off x="609600" y="3321028"/>
+            <a:ext cx="10795000" cy="717528"/>
           </a:xfrm>
           <a:prstGeom prst="rect">
             <a:avLst/>
           </a:prstGeom>
           <a:solidFill>
-            <a:srgbClr val="007F83"/>
+            <a:srgbClr val="FFFFFF"/>
           </a:solidFill>
           <a:ln>
             <a:noFill/>
@@ -15900,14 +16104,14 @@
       </p:sp>
       <p:sp>
         <p:nvSpPr>
-          <p:cNvPr id="10" name="TextBox 9"/>
+          <p:cNvPr id="12" name="TextBox 11"/>
           <p:cNvSpPr txBox="1"/>
           <p:nvPr/>
         </p:nvSpPr>
         <p:spPr>
           <a:xfrm>
-            <a:off x="863600" y="3406775"/>
-            <a:ext cx="10541000" cy="574675"/>
+            <a:off x="762000" y="3448028"/>
+            <a:ext cx="3293533" cy="514328"/>
           </a:xfrm>
           <a:prstGeom prst="rect">
             <a:avLst/>
@@ -15922,15 +16126,15 @@
           <a:p>
             <a:pPr>
               <a:lnSpc>
-                <a:spcPts val="2583"/>
-              </a:lnSpc>
-              <a:spcBef>
-                <a:spcPts val="0"/>
-              </a:spcBef>
-              <a:spcAft>
-                <a:spcPts val="0"/>
-              </a:spcAft>
-              <a:defRPr sz="2100" b="0">
+                <a:spcPts val="1968"/>
+              </a:lnSpc>
+              <a:spcBef>
+                <a:spcPts val="0"/>
+              </a:spcBef>
+              <a:spcAft>
+                <a:spcPts val="0"/>
+              </a:spcAft>
+              <a:defRPr sz="1600" b="0">
                 <a:solidFill>
                   <a:srgbClr val="142A40"/>
                 </a:solidFill>
@@ -15938,27 +16142,139 @@
               </a:defRPr>
             </a:pPr>
             <a:r>
-              <a:t>Obtain the alternative roster, attributable receipts, margins and funding records.</a:t>
-            </a:r>
-          </a:p>
-        </p:txBody>
-      </p:sp>
-      <p:sp>
-        <p:nvSpPr>
-          <p:cNvPr id="11" name="Rectangle 10"/>
+              <a:t>Ohtani</a:t>
+            </a:r>
+          </a:p>
+        </p:txBody>
+      </p:sp>
+      <p:sp>
+        <p:nvSpPr>
+          <p:cNvPr id="13" name="TextBox 12"/>
+          <p:cNvSpPr txBox="1"/>
+          <p:nvPr/>
+        </p:nvSpPr>
+        <p:spPr>
+          <a:xfrm>
+            <a:off x="4360333" y="3448028"/>
+            <a:ext cx="3293533" cy="514328"/>
+          </a:xfrm>
+          <a:prstGeom prst="rect">
+            <a:avLst/>
+          </a:prstGeom>
+          <a:noFill/>
+        </p:spPr>
+        <p:txBody>
+          <a:bodyPr wrap="none" lIns="0" rIns="0" tIns="0" bIns="0">
+            <a:spAutoFit/>
+          </a:bodyPr>
+          <a:lstStyle/>
+          <a:p>
+            <a:pPr>
+              <a:lnSpc>
+                <a:spcPts val="1968"/>
+              </a:lnSpc>
+              <a:spcBef>
+                <a:spcPts val="0"/>
+              </a:spcBef>
+              <a:spcAft>
+                <a:spcPts val="0"/>
+              </a:spcAft>
+              <a:defRPr sz="1600" b="0">
+                <a:solidFill>
+                  <a:srgbClr val="142A40"/>
+                </a:solidFill>
+                <a:latin typeface="Arial"/>
+              </a:defRPr>
+            </a:pPr>
+            <a:r>
+              <a:t>10 years / $700m</a:t>
+            </a:r>
+          </a:p>
+        </p:txBody>
+      </p:sp>
+      <p:sp>
+        <p:nvSpPr>
+          <p:cNvPr id="14" name="TextBox 13"/>
+          <p:cNvSpPr txBox="1"/>
+          <p:nvPr/>
+        </p:nvSpPr>
+        <p:spPr>
+          <a:xfrm>
+            <a:off x="7958666" y="3448028"/>
+            <a:ext cx="3293533" cy="514328"/>
+          </a:xfrm>
+          <a:prstGeom prst="rect">
+            <a:avLst/>
+          </a:prstGeom>
+          <a:noFill/>
+        </p:spPr>
+        <p:txBody>
+          <a:bodyPr wrap="none" lIns="0" rIns="0" tIns="0" bIns="0">
+            <a:spAutoFit/>
+          </a:bodyPr>
+          <a:lstStyle/>
+          <a:p>
+            <a:pPr>
+              <a:lnSpc>
+                <a:spcPts val="1968"/>
+              </a:lnSpc>
+              <a:spcBef>
+                <a:spcPts val="0"/>
+              </a:spcBef>
+              <a:spcAft>
+                <a:spcPts val="0"/>
+              </a:spcAft>
+              <a:defRPr sz="1600" b="0">
+                <a:solidFill>
+                  <a:srgbClr val="142A40"/>
+                </a:solidFill>
+                <a:latin typeface="Arial"/>
+              </a:defRPr>
+            </a:pPr>
+            <a:r>
+              <a:t>$2m annually 2024-33; $68m</a:t>
+            </a:r>
+          </a:p>
+          <a:p>
+            <a:pPr>
+              <a:lnSpc>
+                <a:spcPts val="1968"/>
+              </a:lnSpc>
+              <a:spcBef>
+                <a:spcPts val="0"/>
+              </a:spcBef>
+              <a:spcAft>
+                <a:spcPts val="0"/>
+              </a:spcAft>
+              <a:defRPr sz="1600" b="0">
+                <a:solidFill>
+                  <a:srgbClr val="142A40"/>
+                </a:solidFill>
+                <a:latin typeface="Arial"/>
+              </a:defRPr>
+            </a:pPr>
+            <a:r>
+              <a:t>annually 2034-43</a:t>
+            </a:r>
+          </a:p>
+        </p:txBody>
+      </p:sp>
+      <p:sp>
+        <p:nvSpPr>
+          <p:cNvPr id="15" name="Rectangle 14"/>
           <p:cNvSpPr/>
           <p:nvPr/>
         </p:nvSpPr>
         <p:spPr>
           <a:xfrm>
-            <a:off x="609600" y="4298950"/>
-            <a:ext cx="63500" cy="63500"/>
+            <a:off x="609600" y="4038557"/>
+            <a:ext cx="10795000" cy="717528"/>
           </a:xfrm>
           <a:prstGeom prst="rect">
             <a:avLst/>
           </a:prstGeom>
           <a:solidFill>
-            <a:srgbClr val="007F83"/>
+            <a:srgbClr val="DDEDEE"/>
           </a:solidFill>
           <a:ln>
             <a:noFill/>
@@ -15988,14 +16304,14 @@
       </p:sp>
       <p:sp>
         <p:nvSpPr>
-          <p:cNvPr id="12" name="TextBox 11"/>
+          <p:cNvPr id="16" name="TextBox 15"/>
           <p:cNvSpPr txBox="1"/>
           <p:nvPr/>
         </p:nvSpPr>
         <p:spPr>
           <a:xfrm>
-            <a:off x="863600" y="4210050"/>
-            <a:ext cx="10541000" cy="574675"/>
+            <a:off x="762000" y="4165557"/>
+            <a:ext cx="3293533" cy="514328"/>
           </a:xfrm>
           <a:prstGeom prst="rect">
             <a:avLst/>
@@ -16010,15 +16326,15 @@
           <a:p>
             <a:pPr>
               <a:lnSpc>
-                <a:spcPts val="2583"/>
-              </a:lnSpc>
-              <a:spcBef>
-                <a:spcPts val="0"/>
-              </a:spcBef>
-              <a:spcAft>
-                <a:spcPts val="0"/>
-              </a:spcAft>
-              <a:defRPr sz="2100" b="0">
+                <a:spcPts val="1968"/>
+              </a:lnSpc>
+              <a:spcBef>
+                <a:spcPts val="0"/>
+              </a:spcBef>
+              <a:spcAft>
+                <a:spcPts val="0"/>
+              </a:spcAft>
+              <a:defRPr sz="1600" b="0">
                 <a:solidFill>
                   <a:srgbClr val="142A40"/>
                 </a:solidFill>
@@ -16026,64 +16342,21 @@
               </a:defRPr>
             </a:pPr>
             <a:r>
-              <a:t>Count sporting benefits once; keep player endorsements outside club receipts.</a:t>
-            </a:r>
-          </a:p>
-        </p:txBody>
-      </p:sp>
-      <p:sp>
-        <p:nvSpPr>
-          <p:cNvPr id="13" name="Rectangle 12"/>
-          <p:cNvSpPr/>
-          <p:nvPr/>
-        </p:nvSpPr>
-        <p:spPr>
-          <a:xfrm>
-            <a:off x="609600" y="5102225"/>
-            <a:ext cx="63500" cy="63500"/>
-          </a:xfrm>
-          <a:prstGeom prst="rect">
-            <a:avLst/>
-          </a:prstGeom>
-          <a:solidFill>
-            <a:srgbClr val="007F83"/>
-          </a:solidFill>
-          <a:ln>
-            <a:noFill/>
-          </a:ln>
-        </p:spPr>
-        <p:style>
-          <a:lnRef idx="1">
-            <a:schemeClr val="accent1"/>
-          </a:lnRef>
-          <a:fillRef idx="3">
-            <a:schemeClr val="accent1"/>
-          </a:fillRef>
-          <a:effectRef idx="2">
-            <a:schemeClr val="accent1"/>
-          </a:effectRef>
-          <a:fontRef idx="minor">
-            <a:schemeClr val="lt1"/>
-          </a:fontRef>
-        </p:style>
-        <p:txBody>
-          <a:bodyPr rtlCol="0" anchor="ctr"/>
-          <a:lstStyle/>
-          <a:p>
-            <a:pPr algn="ctr"/>
-          </a:p>
-        </p:txBody>
-      </p:sp>
-      <p:sp>
-        <p:nvSpPr>
-          <p:cNvPr id="14" name="TextBox 13"/>
+              <a:t>Soto</a:t>
+            </a:r>
+          </a:p>
+        </p:txBody>
+      </p:sp>
+      <p:sp>
+        <p:nvSpPr>
+          <p:cNvPr id="17" name="TextBox 16"/>
           <p:cNvSpPr txBox="1"/>
           <p:nvPr/>
         </p:nvSpPr>
         <p:spPr>
           <a:xfrm>
-            <a:off x="863600" y="5013325"/>
-            <a:ext cx="10541000" cy="574675"/>
+            <a:off x="4360333" y="4165557"/>
+            <a:ext cx="3293533" cy="514328"/>
           </a:xfrm>
           <a:prstGeom prst="rect">
             <a:avLst/>
@@ -16098,15 +16371,15 @@
           <a:p>
             <a:pPr>
               <a:lnSpc>
-                <a:spcPts val="2214"/>
-              </a:lnSpc>
-              <a:spcBef>
-                <a:spcPts val="0"/>
-              </a:spcBef>
-              <a:spcAft>
-                <a:spcPts val="0"/>
-              </a:spcAft>
-              <a:defRPr sz="1800" b="0">
+                <a:spcPts val="1968"/>
+              </a:lnSpc>
+              <a:spcBef>
+                <a:spcPts val="0"/>
+              </a:spcBef>
+              <a:spcAft>
+                <a:spcPts val="0"/>
+              </a:spcAft>
+              <a:defRPr sz="1600" b="0">
                 <a:solidFill>
                   <a:srgbClr val="142A40"/>
                 </a:solidFill>
@@ -16114,43 +16387,21 @@
               </a:defRPr>
             </a:pPr>
             <a:r>
-              <a:t>Update remaining obligations for today. Current evidence does not prove net breakeven or a best-ever</a:t>
-            </a:r>
-          </a:p>
-          <a:p>
-            <a:pPr>
-              <a:lnSpc>
-                <a:spcPts val="2214"/>
-              </a:lnSpc>
-              <a:spcBef>
-                <a:spcPts val="0"/>
-              </a:spcBef>
-              <a:spcAft>
-                <a:spcPts val="0"/>
-              </a:spcAft>
-              <a:defRPr sz="1800" b="0">
-                <a:solidFill>
-                  <a:srgbClr val="142A40"/>
-                </a:solidFill>
-                <a:latin typeface="Arial"/>
-              </a:defRPr>
-            </a:pPr>
-            <a:r>
-              <a:t>ranking.</a:t>
-            </a:r>
-          </a:p>
-        </p:txBody>
-      </p:sp>
-      <p:sp>
-        <p:nvSpPr>
-          <p:cNvPr id="15" name="TextBox 14"/>
+              <a:t>15 years / $765m</a:t>
+            </a:r>
+          </a:p>
+        </p:txBody>
+      </p:sp>
+      <p:sp>
+        <p:nvSpPr>
+          <p:cNvPr id="18" name="TextBox 17"/>
           <p:cNvSpPr txBox="1"/>
           <p:nvPr/>
         </p:nvSpPr>
         <p:spPr>
           <a:xfrm>
-            <a:off x="609600" y="6070600"/>
-            <a:ext cx="10642600" cy="368300"/>
+            <a:off x="7958666" y="4165557"/>
+            <a:ext cx="3293533" cy="514328"/>
           </a:xfrm>
           <a:prstGeom prst="rect">
             <a:avLst/>
@@ -16165,6 +16416,162 @@
           <a:p>
             <a:pPr>
               <a:lnSpc>
+                <a:spcPts val="1968"/>
+              </a:lnSpc>
+              <a:spcBef>
+                <a:spcPts val="0"/>
+              </a:spcBef>
+              <a:spcAft>
+                <a:spcPts val="0"/>
+              </a:spcAft>
+              <a:defRPr sz="1600" b="0">
+                <a:solidFill>
+                  <a:srgbClr val="142A40"/>
+                </a:solidFill>
+                <a:latin typeface="Arial"/>
+              </a:defRPr>
+            </a:pPr>
+            <a:r>
+              <a:t>No deferrals; conditional opt-out</a:t>
+            </a:r>
+          </a:p>
+          <a:p>
+            <a:pPr>
+              <a:lnSpc>
+                <a:spcPts val="1968"/>
+              </a:lnSpc>
+              <a:spcBef>
+                <a:spcPts val="0"/>
+              </a:spcBef>
+              <a:spcAft>
+                <a:spcPts val="0"/>
+              </a:spcAft>
+              <a:defRPr sz="1600" b="0">
+                <a:solidFill>
+                  <a:srgbClr val="142A40"/>
+                </a:solidFill>
+                <a:latin typeface="Arial"/>
+              </a:defRPr>
+            </a:pPr>
+            <a:r>
+              <a:t>after year five</a:t>
+            </a:r>
+          </a:p>
+        </p:txBody>
+      </p:sp>
+      <p:sp>
+        <p:nvSpPr>
+          <p:cNvPr id="19" name="TextBox 18"/>
+          <p:cNvSpPr txBox="1"/>
+          <p:nvPr/>
+        </p:nvSpPr>
+        <p:spPr>
+          <a:xfrm>
+            <a:off x="609600" y="4908486"/>
+            <a:ext cx="10795000" cy="680783"/>
+          </a:xfrm>
+          <a:prstGeom prst="rect">
+            <a:avLst/>
+          </a:prstGeom>
+          <a:noFill/>
+        </p:spPr>
+        <p:txBody>
+          <a:bodyPr wrap="none" lIns="0" rIns="0" tIns="0" bIns="0">
+            <a:spAutoFit/>
+          </a:bodyPr>
+          <a:lstStyle/>
+          <a:p>
+            <a:pPr>
+              <a:lnSpc>
+                <a:spcPts val="1783"/>
+              </a:lnSpc>
+              <a:spcBef>
+                <a:spcPts val="0"/>
+              </a:spcBef>
+              <a:spcAft>
+                <a:spcPts val="0"/>
+              </a:spcAft>
+              <a:defRPr sz="1450" b="0">
+                <a:solidFill>
+                  <a:srgbClr val="506274"/>
+                </a:solidFill>
+                <a:latin typeface="Arial"/>
+              </a:defRPr>
+            </a:pPr>
+            <a:r>
+              <a:t>Normalize valuation date, cash timing, duration, option scenarios and expected contribution before comparing.</a:t>
+            </a:r>
+          </a:p>
+          <a:p>
+            <a:pPr>
+              <a:lnSpc>
+                <a:spcPts val="1783"/>
+              </a:lnSpc>
+              <a:spcBef>
+                <a:spcPts val="0"/>
+              </a:spcBef>
+              <a:spcAft>
+                <a:spcPts val="0"/>
+              </a:spcAft>
+              <a:defRPr sz="1450" b="0">
+                <a:solidFill>
+                  <a:srgbClr val="506274"/>
+                </a:solidFill>
+                <a:latin typeface="Arial"/>
+              </a:defRPr>
+            </a:pPr>
+            <a:r>
+              <a:t>Value retained club contribution and roster alternatives against compensation, marginal CBT tax and other incremental costs.</a:t>
+            </a:r>
+          </a:p>
+          <a:p>
+            <a:pPr>
+              <a:lnSpc>
+                <a:spcPts val="1783"/>
+              </a:lnSpc>
+              <a:spcBef>
+                <a:spcPts val="0"/>
+              </a:spcBef>
+              <a:spcAft>
+                <a:spcPts val="0"/>
+              </a:spcAft>
+              <a:defRPr sz="1450" b="0">
+                <a:solidFill>
+                  <a:srgbClr val="506274"/>
+                </a:solidFill>
+                <a:latin typeface="Arial"/>
+              </a:defRPr>
+            </a:pPr>
+            <a:r>
+              <a:t>Headline totals do not establish net breakeven or a best-ever ranking.</a:t>
+            </a:r>
+          </a:p>
+        </p:txBody>
+      </p:sp>
+      <p:sp>
+        <p:nvSpPr>
+          <p:cNvPr id="20" name="TextBox 19"/>
+          <p:cNvSpPr txBox="1"/>
+          <p:nvPr/>
+        </p:nvSpPr>
+        <p:spPr>
+          <a:xfrm>
+            <a:off x="609600" y="6070600"/>
+            <a:ext cx="3445933" cy="368300"/>
+          </a:xfrm>
+          <a:prstGeom prst="rect">
+            <a:avLst/>
+          </a:prstGeom>
+          <a:noFill/>
+        </p:spPr>
+        <p:txBody>
+          <a:bodyPr wrap="none" lIns="0" rIns="0" tIns="0" bIns="0">
+            <a:spAutoFit/>
+          </a:bodyPr>
+          <a:lstStyle/>
+          <a:p>
+            <a:pPr>
+              <a:lnSpc>
                 <a:spcPts val="1107"/>
               </a:lnSpc>
               <a:spcBef>
@@ -16184,6 +16591,102 @@
               <a:rPr>
                 <a:hlinkClick r:id="rId2"/>
               </a:rPr>
+              <a:t>[MLB1] www.mlb.com</a:t>
+            </a:r>
+          </a:p>
+        </p:txBody>
+      </p:sp>
+      <p:sp>
+        <p:nvSpPr>
+          <p:cNvPr id="21" name="TextBox 20"/>
+          <p:cNvSpPr txBox="1"/>
+          <p:nvPr/>
+        </p:nvSpPr>
+        <p:spPr>
+          <a:xfrm>
+            <a:off x="4207933" y="6070600"/>
+            <a:ext cx="3445933" cy="368300"/>
+          </a:xfrm>
+          <a:prstGeom prst="rect">
+            <a:avLst/>
+          </a:prstGeom>
+          <a:noFill/>
+        </p:spPr>
+        <p:txBody>
+          <a:bodyPr wrap="none" lIns="0" rIns="0" tIns="0" bIns="0">
+            <a:spAutoFit/>
+          </a:bodyPr>
+          <a:lstStyle/>
+          <a:p>
+            <a:pPr>
+              <a:lnSpc>
+                <a:spcPts val="1107"/>
+              </a:lnSpc>
+              <a:spcBef>
+                <a:spcPts val="0"/>
+              </a:spcBef>
+              <a:spcAft>
+                <a:spcPts val="0"/>
+              </a:spcAft>
+              <a:defRPr sz="900" b="0">
+                <a:solidFill>
+                  <a:srgbClr val="506274"/>
+                </a:solidFill>
+                <a:latin typeface="Arial"/>
+              </a:defRPr>
+            </a:pPr>
+            <a:r>
+              <a:rPr>
+                <a:hlinkClick r:id="rId3"/>
+              </a:rPr>
+              <a:t>[SOTO1] www.mlb.com</a:t>
+            </a:r>
+          </a:p>
+        </p:txBody>
+      </p:sp>
+      <p:sp>
+        <p:nvSpPr>
+          <p:cNvPr id="22" name="TextBox 21"/>
+          <p:cNvSpPr txBox="1"/>
+          <p:nvPr/>
+        </p:nvSpPr>
+        <p:spPr>
+          <a:xfrm>
+            <a:off x="7806266" y="6070600"/>
+            <a:ext cx="3445933" cy="368300"/>
+          </a:xfrm>
+          <a:prstGeom prst="rect">
+            <a:avLst/>
+          </a:prstGeom>
+          <a:noFill/>
+        </p:spPr>
+        <p:txBody>
+          <a:bodyPr wrap="none" lIns="0" rIns="0" tIns="0" bIns="0">
+            <a:spAutoFit/>
+          </a:bodyPr>
+          <a:lstStyle/>
+          <a:p>
+            <a:pPr>
+              <a:lnSpc>
+                <a:spcPts val="1107"/>
+              </a:lnSpc>
+              <a:spcBef>
+                <a:spcPts val="0"/>
+              </a:spcBef>
+              <a:spcAft>
+                <a:spcPts val="0"/>
+              </a:spcAft>
+              <a:defRPr sz="900" b="0">
+                <a:solidFill>
+                  <a:srgbClr val="506274"/>
+                </a:solidFill>
+                <a:latin typeface="Arial"/>
+              </a:defRPr>
+            </a:pPr>
+            <a:r>
+              <a:rPr>
+                <a:hlinkClick r:id="rId4"/>
+              </a:rPr>
               <a:t>[FRED_MODEL] finance.json</a:t>
             </a:r>
           </a:p>
@@ -16191,7 +16694,7 @@
       </p:sp>
       <p:cxnSp>
         <p:nvCxnSpPr>
-          <p:cNvPr id="16" name="Connector 15"/>
+          <p:cNvPr id="23" name="Connector 22"/>
           <p:cNvCxnSpPr/>
           <p:nvPr/>
         </p:nvCxnSpPr>
@@ -16226,7 +16729,7 @@
       </p:cxnSp>
       <p:sp>
         <p:nvSpPr>
-          <p:cNvPr id="17" name="TextBox 16"/>
+          <p:cNvPr id="24" name="TextBox 23"/>
           <p:cNvSpPr txBox="1"/>
           <p:nvPr/>
         </p:nvSpPr>
@@ -16271,7 +16774,7 @@
       </p:sp>
       <p:sp>
         <p:nvSpPr>
-          <p:cNvPr id="18" name="TextBox 17"/>
+          <p:cNvPr id="25" name="TextBox 24"/>
           <p:cNvSpPr txBox="1"/>
           <p:nvPr/>
         </p:nvSpPr>
